--- a/docs/links-24/presentations/Familiar-Nine-for-managers.pptx
+++ b/docs/links-24/presentations/Familiar-Nine-for-managers.pptx
@@ -6586,7 +6586,7 @@
                 <a:ea typeface="Inter" pitchFamily="34" charset="-122"/>
                 <a:cs typeface="Inter" pitchFamily="34" charset="-120"/>
               </a:rPr>
-              <a:t>A full weekend off one week in four — today one in five</a:t>
+              <a:t>Six full weekends off in 24 weeks — today four in 20</a:t>
             </a:r>
             <a:endParaRPr lang="en-US" sz="1500" dirty="0"/>
           </a:p>
@@ -7064,7 +7064,7 @@
                 <a:ea typeface="Inter" pitchFamily="34" charset="-122"/>
                 <a:cs typeface="Inter" pitchFamily="34" charset="-120"/>
               </a:rPr>
-              <a:t>The trade-off: more late finishes — about one extra each every two or three weeks.</a:t>
+              <a:t>The trade-off: more late finishes — about 59 a year each, against 39 today.</a:t>
             </a:r>
             <a:endParaRPr lang="en-US" sz="1400" dirty="0"/>
           </a:p>
@@ -7347,7 +7347,7 @@
                 <a:ea typeface="Inter" pitchFamily="34" charset="-122"/>
                 <a:cs typeface="Inter" pitchFamily="34" charset="-120"/>
               </a:rPr>
-              <a:t>A weekend off one week in four (today one in five)</a:t>
+              <a:t>Weekends off: 6 in 24 (today 4 in 20)</a:t>
             </a:r>
             <a:endParaRPr lang="en-US" sz="1300" dirty="0"/>
           </a:p>
@@ -7565,7 +7565,7 @@
                 <a:ea typeface="Inter" pitchFamily="34" charset="-122"/>
                 <a:cs typeface="Inter" pitchFamily="34" charset="-120"/>
               </a:rPr>
-              <a:t>About one extra late finish every 2–3 weeks</a:t>
+              <a:t>Late finishes: 59 a year (today 39)</a:t>
             </a:r>
             <a:endParaRPr lang="en-US" sz="1300" dirty="0"/>
           </a:p>
